--- a/K2-Produktivitas/M06-Prompt-Chaining/K2-M06-Prompt-Chaining.pptx
+++ b/K2-Produktivitas/M06-Prompt-Chaining/K2-M06-Prompt-Chaining.pptx
@@ -10,9 +10,10 @@
     <p:sldId id="258" r:id="rId4"/>
     <p:sldId id="259" r:id="rId5"/>
     <p:sldId id="260" r:id="rId6"/>
+    <p:sldId id="261" r:id="rId7"/>
   </p:sldIdLst>
   <p:notesMasterIdLst>
-    <p:notesMasterId r:id="rId7"/>
+    <p:notesMasterId r:id="rId8"/>
   </p:notesMasterIdLst>
   <p:sldSz cx="12191695" cy="6858000"/>
   <p:notesSz cx="6858000" cy="12191695"/>
@@ -882,6 +883,94 @@
             <a:fld id="{F7021451-1387-4CA6-816F-3879F97B5CBC}" type="slidenum">
               <a:rPr lang="en-US"/>
               <a:t>5</a:t>
+            </a:fld>
+            <a:endParaRPr lang="en-US"/>
+          </a:p>
+        </p:txBody>
+      </p:sp>
+    </p:spTree>
+    <p:extLst>
+      <p:ext uri="{BB962C8B-B14F-4D97-AF65-F5344CB8AC3E}">
+        <p14:creationId xmlns:p14="http://schemas.microsoft.com/office/powerpoint/2010/main" val="1024086991"/>
+      </p:ext>
+    </p:extLst>
+  </p:cSld>
+  <p:clrMapOvr>
+    <a:masterClrMapping/>
+  </p:clrMapOvr>
+</p:notes>
+</file>
+
+<file path=ppt/notesSlides/notesSlide6.xml><?xml version="1.0" encoding="utf-8"?>
+<p:notes xmlns:a="http://schemas.openxmlformats.org/drawingml/2006/main" xmlns:r="http://schemas.openxmlformats.org/officeDocument/2006/relationships" xmlns:p="http://schemas.openxmlformats.org/presentationml/2006/main">
+  <p:cSld>
+    <p:spTree>
+      <p:nvGrpSpPr>
+        <p:cNvPr id="1" name=""/>
+        <p:cNvGrpSpPr/>
+        <p:nvPr/>
+      </p:nvGrpSpPr>
+      <p:grpSpPr>
+        <a:xfrm>
+          <a:off x="0" y="0"/>
+          <a:ext cx="0" cy="0"/>
+          <a:chOff x="0" y="0"/>
+          <a:chExt cx="0" cy="0"/>
+        </a:xfrm>
+      </p:grpSpPr>
+      <p:sp>
+        <p:nvSpPr>
+          <p:cNvPr id="2" name="Slide Image Placeholder 1"/>
+          <p:cNvSpPr>
+            <a:spLocks noGrp="1" noRot="1" noChangeAspect="1"/>
+          </p:cNvSpPr>
+          <p:nvPr>
+            <p:ph type="sldImg"/>
+          </p:nvPr>
+        </p:nvSpPr>
+        <p:spPr/>
+      </p:sp>
+      <p:sp>
+        <p:nvSpPr>
+          <p:cNvPr id="3" name="Notes Placeholder 2"/>
+          <p:cNvSpPr>
+            <a:spLocks noGrp="1"/>
+          </p:cNvSpPr>
+          <p:nvPr>
+            <p:ph type="body" idx="1"/>
+          </p:nvPr>
+        </p:nvSpPr>
+        <p:spPr/>
+        <p:txBody>
+          <a:bodyPr/>
+          <a:lstStyle/>
+          <a:p>
+            <a:r>
+              <a:rPr lang="en-US" dirty="0"/>
+              <a:t/>
+            </a:r>
+            <a:endParaRPr lang="en-US" dirty="0"/>
+          </a:p>
+        </p:txBody>
+      </p:sp>
+      <p:sp>
+        <p:nvSpPr>
+          <p:cNvPr id="4" name="Slide Number Placeholder 3"/>
+          <p:cNvSpPr>
+            <a:spLocks noGrp="1"/>
+          </p:cNvSpPr>
+          <p:nvPr>
+            <p:ph type="sldNum" sz="quarter" idx="10"/>
+          </p:nvPr>
+        </p:nvSpPr>
+        <p:spPr/>
+        <p:txBody>
+          <a:bodyPr/>
+          <a:lstStyle/>
+          <a:p>
+            <a:fld id="{F7021451-1387-4CA6-816F-3879F97B5CBC}" type="slidenum">
+              <a:rPr lang="en-US"/>
+              <a:t>6</a:t>
             </a:fld>
             <a:endParaRPr lang="en-US"/>
           </a:p>
@@ -3818,6 +3907,464 @@
 </p:sld>
 </file>
 
+<file path=ppt/slides/slide6.xml><?xml version="1.0" encoding="utf-8"?>
+<p:sld xmlns:a="http://schemas.openxmlformats.org/drawingml/2006/main" xmlns:r="http://schemas.openxmlformats.org/officeDocument/2006/relationships" xmlns:p="http://schemas.openxmlformats.org/presentationml/2006/main">
+  <p:cSld name="Slide 6">
+    <p:bg>
+      <p:bgPr>
+        <a:solidFill>
+          <a:srgbClr val="FFFFFF"/>
+        </a:solidFill>
+      </p:bgPr>
+    </p:bg>
+    <p:spTree>
+      <p:nvGrpSpPr>
+        <p:cNvPr id="1" name=""/>
+        <p:cNvGrpSpPr/>
+        <p:nvPr/>
+      </p:nvGrpSpPr>
+      <p:grpSpPr>
+        <a:xfrm>
+          <a:off x="0" y="0"/>
+          <a:ext cx="0" cy="0"/>
+          <a:chOff x="0" y="0"/>
+          <a:chExt cx="0" cy="0"/>
+        </a:xfrm>
+      </p:grpSpPr>
+      <p:sp>
+        <p:nvSpPr>
+          <p:cNvPr id="2" name="Shape 0"/>
+          <p:cNvSpPr/>
+          <p:nvPr/>
+        </p:nvSpPr>
+        <p:spPr>
+          <a:xfrm>
+            <a:off x="0" y="0"/>
+            <a:ext cx="12191695" cy="960120"/>
+          </a:xfrm>
+          <a:prstGeom prst="rect">
+            <a:avLst/>
+          </a:prstGeom>
+          <a:solidFill>
+            <a:srgbClr val="0D1321"/>
+          </a:solidFill>
+          <a:ln/>
+        </p:spPr>
+      </p:sp>
+      <p:sp>
+        <p:nvSpPr>
+          <p:cNvPr id="3" name="Shape 1"/>
+          <p:cNvSpPr/>
+          <p:nvPr/>
+        </p:nvSpPr>
+        <p:spPr>
+          <a:xfrm>
+            <a:off x="0" y="960120"/>
+            <a:ext cx="12191695" cy="41148"/>
+          </a:xfrm>
+          <a:prstGeom prst="rect">
+            <a:avLst/>
+          </a:prstGeom>
+          <a:solidFill>
+            <a:srgbClr val="6849F6"/>
+          </a:solidFill>
+          <a:ln/>
+        </p:spPr>
+      </p:sp>
+      <p:sp>
+        <p:nvSpPr>
+          <p:cNvPr id="4" name="Text 2"/>
+          <p:cNvSpPr/>
+          <p:nvPr/>
+        </p:nvSpPr>
+        <p:spPr>
+          <a:xfrm>
+            <a:off x="502920" y="256032"/>
+            <a:ext cx="3657600" cy="457200"/>
+          </a:xfrm>
+          <a:prstGeom prst="rect">
+            <a:avLst/>
+          </a:prstGeom>
+          <a:noFill/>
+          <a:ln/>
+        </p:spPr>
+        <p:txBody>
+          <a:bodyPr wrap="square" lIns="0" tIns="0" rIns="0" bIns="0" rtlCol="0" anchor="ctr"/>
+          <a:lstStyle/>
+          <a:p>
+            <a:pPr indent="0" marL="0">
+              <a:buNone/>
+            </a:pPr>
+            <a:r>
+              <a:rPr lang="en-US" sz="2000" b="1" dirty="0">
+                <a:solidFill>
+                  <a:srgbClr val="FFFFFF"/>
+                </a:solidFill>
+                <a:latin typeface="Helvetica" pitchFamily="34" charset="0"/>
+                <a:ea typeface="Helvetica" pitchFamily="34" charset="-122"/>
+                <a:cs typeface="Helvetica" pitchFamily="34" charset="-120"/>
+              </a:rPr>
+              <a:t>belajar</a:t>
+            </a:r>
+            <a:pPr indent="0" marL="0">
+              <a:buNone/>
+            </a:pPr>
+            <a:r>
+              <a:rPr lang="en-US" sz="2000" b="1" dirty="0">
+                <a:solidFill>
+                  <a:srgbClr val="8B7CF6"/>
+                </a:solidFill>
+                <a:latin typeface="Helvetica" pitchFamily="34" charset="0"/>
+                <a:ea typeface="Helvetica" pitchFamily="34" charset="-122"/>
+                <a:cs typeface="Helvetica" pitchFamily="34" charset="-120"/>
+              </a:rPr>
+              <a:t>claude</a:t>
+            </a:r>
+            <a:endParaRPr lang="en-US" sz="2000" dirty="0"/>
+          </a:p>
+        </p:txBody>
+      </p:sp>
+      <p:sp>
+        <p:nvSpPr>
+          <p:cNvPr id="5" name="Text 3"/>
+          <p:cNvSpPr/>
+          <p:nvPr/>
+        </p:nvSpPr>
+        <p:spPr>
+          <a:xfrm>
+            <a:off x="5943600" y="274320"/>
+            <a:ext cx="5760720" cy="411480"/>
+          </a:xfrm>
+          <a:prstGeom prst="rect">
+            <a:avLst/>
+          </a:prstGeom>
+          <a:noFill/>
+          <a:ln/>
+        </p:spPr>
+        <p:txBody>
+          <a:bodyPr wrap="square" lIns="0" tIns="0" rIns="0" bIns="0" rtlCol="0" anchor="ctr"/>
+          <a:lstStyle/>
+          <a:p>
+            <a:pPr algn="r" indent="0" marL="0">
+              <a:buNone/>
+            </a:pPr>
+            <a:r>
+              <a:rPr lang="en-US" sz="1250" dirty="0">
+                <a:solidFill>
+                  <a:srgbClr val="9AA2B4"/>
+                </a:solidFill>
+                <a:latin typeface="Helvetica" pitchFamily="34" charset="0"/>
+                <a:ea typeface="Helvetica" pitchFamily="34" charset="-122"/>
+                <a:cs typeface="Helvetica" pitchFamily="34" charset="-120"/>
+              </a:rPr>
+              <a:t>Modul 06 — Prompt Chaining</a:t>
+            </a:r>
+            <a:endParaRPr lang="en-US" sz="1250" dirty="0"/>
+          </a:p>
+        </p:txBody>
+      </p:sp>
+      <p:sp>
+        <p:nvSpPr>
+          <p:cNvPr id="6" name="Text 4"/>
+          <p:cNvSpPr/>
+          <p:nvPr/>
+        </p:nvSpPr>
+        <p:spPr>
+          <a:xfrm>
+            <a:off x="548640" y="1188720"/>
+            <a:ext cx="11064240" cy="502920"/>
+          </a:xfrm>
+          <a:prstGeom prst="rect">
+            <a:avLst/>
+          </a:prstGeom>
+          <a:noFill/>
+          <a:ln/>
+        </p:spPr>
+        <p:txBody>
+          <a:bodyPr wrap="square" lIns="0" tIns="0" rIns="0" bIns="0" rtlCol="0" anchor="ctr"/>
+          <a:lstStyle/>
+          <a:p>
+            <a:pPr indent="0" marL="0">
+              <a:buNone/>
+            </a:pPr>
+            <a:r>
+              <a:rPr lang="en-US" sz="2200" b="1" dirty="0">
+                <a:solidFill>
+                  <a:srgbClr val="0D1321"/>
+                </a:solidFill>
+                <a:latin typeface="Helvetica" pitchFamily="34" charset="0"/>
+                <a:ea typeface="Helvetica" pitchFamily="34" charset="-122"/>
+                <a:cs typeface="Helvetica" pitchFamily="34" charset="-120"/>
+              </a:rPr>
+              <a:t>Level Up: Dokumen Jadi File Asli</a:t>
+            </a:r>
+            <a:endParaRPr lang="en-US" sz="2200" dirty="0"/>
+          </a:p>
+        </p:txBody>
+      </p:sp>
+      <p:sp>
+        <p:nvSpPr>
+          <p:cNvPr id="7" name="Text 5"/>
+          <p:cNvSpPr/>
+          <p:nvPr/>
+        </p:nvSpPr>
+        <p:spPr>
+          <a:xfrm>
+            <a:off x="548640" y="1783080"/>
+            <a:ext cx="11094415" cy="274320"/>
+          </a:xfrm>
+          <a:prstGeom prst="rect">
+            <a:avLst/>
+          </a:prstGeom>
+          <a:noFill/>
+          <a:ln/>
+        </p:spPr>
+        <p:txBody>
+          <a:bodyPr wrap="square" lIns="0" tIns="0" rIns="0" bIns="0" rtlCol="0" anchor="ctr"/>
+          <a:lstStyle/>
+          <a:p>
+            <a:pPr indent="0" marL="0">
+              <a:buNone/>
+            </a:pPr>
+            <a:r>
+              <a:rPr lang="en-US" sz="1250" b="1" spc="40" kern="0" dirty="0">
+                <a:solidFill>
+                  <a:srgbClr val="4B36C7"/>
+                </a:solidFill>
+                <a:latin typeface="Helvetica" pitchFamily="34" charset="0"/>
+                <a:ea typeface="Helvetica" pitchFamily="34" charset="-122"/>
+                <a:cs typeface="Helvetica" pitchFamily="34" charset="-120"/>
+              </a:rPr>
+              <a:t>BONUS — HASIL AKHIR CHAIN BISA LANGSUNG JADI FILE</a:t>
+            </a:r>
+            <a:endParaRPr lang="en-US" sz="1250" dirty="0"/>
+          </a:p>
+        </p:txBody>
+      </p:sp>
+      <p:sp>
+        <p:nvSpPr>
+          <p:cNvPr id="8" name="Shape 6"/>
+          <p:cNvSpPr/>
+          <p:nvPr/>
+        </p:nvSpPr>
+        <p:spPr>
+          <a:xfrm>
+            <a:off x="548640" y="2112264"/>
+            <a:ext cx="11094415" cy="1480376"/>
+          </a:xfrm>
+          <a:prstGeom prst="roundRect">
+            <a:avLst>
+              <a:gd name="adj" fmla="val 6177"/>
+            </a:avLst>
+          </a:prstGeom>
+          <a:solidFill>
+            <a:srgbClr val="F3F0FF"/>
+          </a:solidFill>
+          <a:ln w="12700">
+            <a:solidFill>
+              <a:srgbClr val="DCD3FB"/>
+            </a:solidFill>
+            <a:prstDash val="solid"/>
+          </a:ln>
+        </p:spPr>
+      </p:sp>
+      <p:sp>
+        <p:nvSpPr>
+          <p:cNvPr id="9" name="Text 7"/>
+          <p:cNvSpPr/>
+          <p:nvPr/>
+        </p:nvSpPr>
+        <p:spPr>
+          <a:xfrm>
+            <a:off x="749808" y="2313432"/>
+            <a:ext cx="10692079" cy="274320"/>
+          </a:xfrm>
+          <a:prstGeom prst="rect">
+            <a:avLst/>
+          </a:prstGeom>
+          <a:noFill/>
+          <a:ln/>
+        </p:spPr>
+        <p:txBody>
+          <a:bodyPr wrap="square" lIns="0" tIns="0" rIns="0" bIns="0" rtlCol="0" anchor="ctr"/>
+          <a:lstStyle/>
+          <a:p>
+            <a:pPr indent="0" marL="0">
+              <a:buNone/>
+            </a:pPr>
+            <a:r>
+              <a:rPr lang="en-US" sz="1250" b="1" spc="30" kern="0" dirty="0">
+                <a:solidFill>
+                  <a:srgbClr val="4B36C7"/>
+                </a:solidFill>
+                <a:latin typeface="Helvetica" pitchFamily="34" charset="0"/>
+                <a:ea typeface="Helvetica" pitchFamily="34" charset="-122"/>
+                <a:cs typeface="Helvetica" pitchFamily="34" charset="-120"/>
+              </a:rPr>
+              <a:t>◆  KAPAN DIPAKAI</a:t>
+            </a:r>
+            <a:endParaRPr lang="en-US" sz="1250" dirty="0"/>
+          </a:p>
+        </p:txBody>
+      </p:sp>
+      <p:sp>
+        <p:nvSpPr>
+          <p:cNvPr id="10" name="Text 8"/>
+          <p:cNvSpPr/>
+          <p:nvPr/>
+        </p:nvSpPr>
+        <p:spPr>
+          <a:xfrm>
+            <a:off x="749808" y="2660904"/>
+            <a:ext cx="10692079" cy="730568"/>
+          </a:xfrm>
+          <a:prstGeom prst="rect">
+            <a:avLst/>
+          </a:prstGeom>
+          <a:noFill/>
+          <a:ln/>
+        </p:spPr>
+        <p:txBody>
+          <a:bodyPr wrap="square" lIns="0" tIns="0" rIns="0" bIns="0" rtlCol="0" anchor="t"/>
+          <a:lstStyle/>
+          <a:p>
+            <a:pPr indent="0" marL="0">
+              <a:lnSpc>
+                <a:spcPct val="130000"/>
+              </a:lnSpc>
+              <a:buNone/>
+            </a:pPr>
+            <a:r>
+              <a:rPr lang="en-US" sz="1250" dirty="0">
+                <a:solidFill>
+                  <a:srgbClr val="23283A"/>
+                </a:solidFill>
+                <a:latin typeface="Helvetica" pitchFamily="34" charset="0"/>
+                <a:ea typeface="Helvetica" pitchFamily="34" charset="-122"/>
+                <a:cs typeface="Helvetica" pitchFamily="34" charset="-120"/>
+              </a:rPr>
+              <a:t>Proposal hasil chain 4 step masih berupa teks di chat — masih perlu disalin manual ke Word. Langkah terakhir yang sering kelewat: minta Claude langsung hasilkan filenya. Claude bisa membuat Word (.docx) atau PDF asli, lengkap dengan heading dan format rapi, siap dilampirkan ke email.</a:t>
+            </a:r>
+            <a:endParaRPr lang="en-US" sz="1250" dirty="0"/>
+          </a:p>
+        </p:txBody>
+      </p:sp>
+      <p:sp>
+        <p:nvSpPr>
+          <p:cNvPr id="11" name="Shape 9"/>
+          <p:cNvSpPr/>
+          <p:nvPr/>
+        </p:nvSpPr>
+        <p:spPr>
+          <a:xfrm>
+            <a:off x="548640" y="3830384"/>
+            <a:ext cx="11094415" cy="1214984"/>
+          </a:xfrm>
+          <a:prstGeom prst="roundRect">
+            <a:avLst>
+              <a:gd name="adj" fmla="val 7526"/>
+            </a:avLst>
+          </a:prstGeom>
+          <a:solidFill>
+            <a:srgbClr val="141D33"/>
+          </a:solidFill>
+          <a:ln w="12700">
+            <a:solidFill>
+              <a:srgbClr val="6849F6"/>
+            </a:solidFill>
+            <a:prstDash val="solid"/>
+          </a:ln>
+        </p:spPr>
+      </p:sp>
+      <p:sp>
+        <p:nvSpPr>
+          <p:cNvPr id="12" name="Text 10"/>
+          <p:cNvSpPr/>
+          <p:nvPr/>
+        </p:nvSpPr>
+        <p:spPr>
+          <a:xfrm>
+            <a:off x="768096" y="4049840"/>
+            <a:ext cx="10655503" cy="256032"/>
+          </a:xfrm>
+          <a:prstGeom prst="rect">
+            <a:avLst/>
+          </a:prstGeom>
+          <a:noFill/>
+          <a:ln/>
+        </p:spPr>
+        <p:txBody>
+          <a:bodyPr wrap="square" lIns="0" tIns="0" rIns="0" bIns="0" rtlCol="0" anchor="ctr"/>
+          <a:lstStyle/>
+          <a:p>
+            <a:pPr indent="0" marL="0">
+              <a:buNone/>
+            </a:pPr>
+            <a:r>
+              <a:rPr lang="en-US" sz="1150" b="1" spc="30" kern="0" dirty="0">
+                <a:solidFill>
+                  <a:srgbClr val="8B7CF6"/>
+                </a:solidFill>
+                <a:latin typeface="Helvetica" pitchFamily="34" charset="0"/>
+                <a:ea typeface="Helvetica" pitchFamily="34" charset="-122"/>
+                <a:cs typeface="Helvetica" pitchFamily="34" charset="-120"/>
+              </a:rPr>
+              <a:t>CONTOH PROMPT</a:t>
+            </a:r>
+            <a:endParaRPr lang="en-US" sz="1150" dirty="0"/>
+          </a:p>
+        </p:txBody>
+      </p:sp>
+      <p:sp>
+        <p:nvSpPr>
+          <p:cNvPr id="13" name="Text 11"/>
+          <p:cNvSpPr/>
+          <p:nvPr/>
+        </p:nvSpPr>
+        <p:spPr>
+          <a:xfrm>
+            <a:off x="768096" y="4397312"/>
+            <a:ext cx="10655503" cy="428600"/>
+          </a:xfrm>
+          <a:prstGeom prst="rect">
+            <a:avLst/>
+          </a:prstGeom>
+          <a:noFill/>
+          <a:ln/>
+        </p:spPr>
+        <p:txBody>
+          <a:bodyPr wrap="square" lIns="0" tIns="0" rIns="0" bIns="0" rtlCol="0" anchor="t"/>
+          <a:lstStyle/>
+          <a:p>
+            <a:pPr indent="0" marL="0">
+              <a:lnSpc>
+                <a:spcPct val="130000"/>
+              </a:lnSpc>
+              <a:buNone/>
+            </a:pPr>
+            <a:r>
+              <a:rPr lang="en-US" sz="1100" dirty="0">
+                <a:solidFill>
+                  <a:srgbClr val="C7CDE0"/>
+                </a:solidFill>
+                <a:latin typeface="Helvetica" pitchFamily="34" charset="0"/>
+                <a:ea typeface="Helvetica" pitchFamily="34" charset="-122"/>
+                <a:cs typeface="Helvetica" pitchFamily="34" charset="-120"/>
+              </a:rPr>
+              <a:t>Dari proposal yang sudah kita perkuat tadi, buatkan sebagai dokumen Word (.docx) yang rapi: judul, heading per section, paragraf yang sudah diformat, dan siap saya lampirkan langsung ke email tanpa perlu saya susun ulang di Word.</a:t>
+            </a:r>
+            <a:endParaRPr lang="en-US" sz="1100" dirty="0"/>
+          </a:p>
+        </p:txBody>
+      </p:sp>
+    </p:spTree>
+  </p:cSld>
+  <p:clrMapOvr>
+    <a:masterClrMapping/>
+  </p:clrMapOvr>
+</p:sld>
+</file>
+
 <file path=ppt/theme/theme1.xml><?xml version="1.0" encoding="utf-8"?>
 <a:theme xmlns:a="http://schemas.openxmlformats.org/drawingml/2006/main" name="Office Theme">
   <a:themeElements>

--- a/K2-Produktivitas/M06-Prompt-Chaining/K2-M06-Prompt-Chaining.pptx
+++ b/K2-Produktivitas/M06-Prompt-Chaining/K2-M06-Prompt-Chaining.pptx
@@ -2018,7 +2018,7 @@
                 <a:ea typeface="Helvetica" pitchFamily="34" charset="-122"/>
                 <a:cs typeface="Helvetica" pitchFamily="34" charset="-120"/>
               </a:rPr>
-              <a:t>•  Kalau satu prompt menghasilkan hasil yang dangkal atau generik</a:t>
+              <a:t>•  Kalau 1 prompt menghasilkan hasil yang dangkal atau generik</a:t>
             </a:r>
             <a:endParaRPr lang="en-US" sz="1300" dirty="0"/>
           </a:p>
@@ -2260,7 +2260,7 @@
                 <a:ea typeface="Helvetica" pitchFamily="34" charset="-122"/>
                 <a:cs typeface="Helvetica" pitchFamily="34" charset="-120"/>
               </a:rPr>
-              <a:t>RINA — CHAIN 4 STEP UNTUK KERJASAMA BANDUNG</a:t>
+              <a:t>CHAIN 4 STEP UNTUK KERJASAMA BANDUNG</a:t>
             </a:r>
             <a:endParaRPr lang="en-US" sz="1250" dirty="0"/>
           </a:p>
@@ -2552,7 +2552,7 @@
                 <a:ea typeface="Helvetica" pitchFamily="34" charset="-122"/>
                 <a:cs typeface="Helvetica" pitchFamily="34" charset="-120"/>
               </a:rPr>
-              <a:t>Struktur Proposal</a:t>
+              <a:t>Kerangka Proposal</a:t>
             </a:r>
             <a:endParaRPr lang="en-US" sz="1400" dirty="0"/>
           </a:p>
@@ -3415,7 +3415,7 @@
                 <a:ea typeface="Helvetica" pitchFamily="34" charset="-122"/>
                 <a:cs typeface="Helvetica" pitchFamily="34" charset="-120"/>
               </a:rPr>
-              <a:t>•  Konten bulanan: Riset trend → Kalender konten → Draft caption → Review</a:t>
+              <a:t>•  Konten Bulanan: Riset trend → Kalender konten → Draft caption → Review &amp; finalisasi</a:t>
             </a:r>
             <a:endParaRPr lang="en-US" sz="1300" dirty="0"/>
           </a:p>
@@ -3435,7 +3435,7 @@
                 <a:ea typeface="Helvetica" pitchFamily="34" charset="-122"/>
                 <a:cs typeface="Helvetica" pitchFamily="34" charset="-120"/>
               </a:rPr>
-              <a:t>•  Laporan performa: Analisis data → Insight → Narasi → Slide summary</a:t>
+              <a:t>•  Laporan Performa: Analisis data → Temukan insight → Buat narasi → Slide summary</a:t>
             </a:r>
             <a:endParaRPr lang="en-US" sz="1300" dirty="0"/>
           </a:p>

--- a/K2-Produktivitas/M06-Prompt-Chaining/K2-M06-Prompt-Chaining.pptx
+++ b/K2-Produktivitas/M06-Prompt-Chaining/K2-M06-Prompt-Chaining.pptx
@@ -1870,7 +1870,7 @@
         <p:spPr>
           <a:xfrm>
             <a:off x="548640" y="2517973"/>
-            <a:ext cx="11094415" cy="249367"/>
+            <a:ext cx="11094415" cy="498734"/>
           </a:xfrm>
           <a:prstGeom prst="rect">
             <a:avLst/>
@@ -1897,7 +1897,7 @@
                 <a:ea typeface="Helvetica" pitchFamily="34" charset="-122"/>
                 <a:cs typeface="Helvetica" pitchFamily="34" charset="-120"/>
               </a:rPr>
-              <a:t>Satu prompt menghasilkan output. Output itu jadi input untuk prompt berikutnya. Setiap step membangun di atas konteks yang sudah ada.</a:t>
+              <a:t>Prompt chaining adalah cara memecah tugas kompleks jadi beberapa step berurutan dalam satu chat yang sama — output dari satu prompt jadi input untuk prompt berikutnya, dan setiap step membangun di atas konteks yang sudah ada.</a:t>
             </a:r>
             <a:endParaRPr lang="en-US" sz="1300" dirty="0"/>
           </a:p>
@@ -1911,7 +1911,7 @@
         </p:nvSpPr>
         <p:spPr>
           <a:xfrm>
-            <a:off x="548640" y="3005084"/>
+            <a:off x="548640" y="3254451"/>
             <a:ext cx="11094415" cy="274320"/>
           </a:xfrm>
           <a:prstGeom prst="rect">
@@ -1950,7 +1950,7 @@
         </p:nvSpPr>
         <p:spPr>
           <a:xfrm>
-            <a:off x="548640" y="3334268"/>
+            <a:off x="548640" y="3583635"/>
             <a:ext cx="11094415" cy="876681"/>
           </a:xfrm>
           <a:prstGeom prst="rect">
@@ -1998,7 +1998,7 @@
                 <a:ea typeface="Helvetica" pitchFamily="34" charset="-122"/>
                 <a:cs typeface="Helvetica" pitchFamily="34" charset="-120"/>
               </a:rPr>
-              <a:t>•  Tugas yang punya tahapan logis — riset → draft → review → finalisasi</a:t>
+              <a:t>•  Tugas yang punya tahapan logis (riset → draft → review → finalisasi)</a:t>
             </a:r>
             <a:endParaRPr lang="en-US" sz="1300" dirty="0"/>
           </a:p>
@@ -2018,7 +2018,7 @@
                 <a:ea typeface="Helvetica" pitchFamily="34" charset="-122"/>
                 <a:cs typeface="Helvetica" pitchFamily="34" charset="-120"/>
               </a:rPr>
-              <a:t>•  Kalau 1 prompt menghasilkan hasil yang dangkal atau generik</a:t>
+              <a:t>•  Kalau 1 prompt langsung menghasilkan hasil yang dangkal dan generik</a:t>
             </a:r>
             <a:endParaRPr lang="en-US" sz="1300" dirty="0"/>
           </a:p>
